--- a/docs/presentation.pptx
+++ b/docs/presentation.pptx
@@ -4,6 +4,9 @@
   <p:sldMasterIdLst>
     <p:sldMasterId id="2147483648" r:id="rId1"/>
   </p:sldMasterIdLst>
+  <p:notesMasterIdLst>
+    <p:notesMasterId r:id="rId9"/>
+  </p:notesMasterIdLst>
   <p:sldIdLst>
     <p:sldId id="256" r:id="rId2"/>
     <p:sldId id="257" r:id="rId3"/>
@@ -13,9 +16,6 @@
     <p:sldId id="261" r:id="rId7"/>
     <p:sldId id="262" r:id="rId8"/>
   </p:sldIdLst>
-  <p:notesMasterIdLst>
-    <p:notesMasterId r:id="rId9"/>
-  </p:notesMasterIdLst>
   <p:sldSz cx="12192000" cy="6858000"/>
   <p:notesSz cx="6858000" cy="12192000"/>
   <p:defaultTextStyle>
@@ -110,13 +110,20 @@
       </a:defRPr>
     </a:lvl9pPr>
   </p:defaultTextStyle>
+  <p:extLst>
+    <p:ext uri="{EFAFB233-063F-42B5-8137-9DF3F51BA10A}">
+      <p15:sldGuideLst xmlns:p15="http://schemas.microsoft.com/office/powerpoint/2012/main"/>
+    </p:ext>
+  </p:extLst>
 </p:presentation>
 </file>
 
 <file path=ppt/charts/chart1.xml><?xml version="1.0" encoding="utf-8"?>
-<c:chartSpace xmlns:c="http://schemas.openxmlformats.org/drawingml/2006/chart" xmlns:a="http://schemas.openxmlformats.org/drawingml/2006/main" xmlns:r="http://schemas.openxmlformats.org/officeDocument/2006/relationships">
+<c:chartSpace xmlns:c="http://schemas.openxmlformats.org/drawingml/2006/chart" xmlns:a="http://schemas.openxmlformats.org/drawingml/2006/main" xmlns:r="http://schemas.openxmlformats.org/officeDocument/2006/relationships" xmlns:c16r2="http://schemas.microsoft.com/office/drawing/2015/06/chart">
   <c:date1904 val="0"/>
+  <c:lang val="en-US"/>
   <c:roundedCorners val="1"/>
+  <c:style val="2"/>
   <c:chart>
     <c:autoTitleDeleted val="1"/>
     <c:plotArea>
@@ -146,40 +153,15 @@
             <a:effectLst/>
           </c:spPr>
           <c:invertIfNegative val="0"/>
-          <c:dLbls>
-            <c:numFmt formatCode="0.00&quot;M&quot;" sourceLinked="0"/>
-            <c:txPr>
-              <a:bodyPr/>
-              <a:lstStyle/>
-              <a:p>
-                <a:pPr>
-                  <a:defRPr b="0" i="0" strike="noStrike" sz="1200" u="none">
-                    <a:solidFill>
-                      <a:srgbClr val="102C36"/>
-                    </a:solidFill>
-                    <a:latin typeface="Aptos"/>
-                  </a:defRPr>
-                </a:pPr>
-              </a:p>
-            </c:txPr>
-            <c:showLegendKey val="0"/>
-            <c:showVal val="1"/>
-            <c:showCatName val="0"/>
-            <c:showSerName val="0"/>
-            <c:showPercent val="0"/>
-            <c:showBubbleSize val="0"/>
-            <c:showLeaderLines val="0"/>
-          </c:dLbls>
           <c:dPt>
             <c:idx val="0"/>
             <c:invertIfNegative val="0"/>
             <c:bubble3D val="0"/>
-            <c:spPr>
-              <a:solidFill>
-                <a:srgbClr val="102C36"/>
-              </a:solidFill>
-              <a:effectLst/>
-            </c:spPr>
+            <c:extLst>
+              <c:ext xmlns:c16="http://schemas.microsoft.com/office/drawing/2014/chart" uri="{C3380CC4-5D6E-409C-BE32-E72D297353CC}">
+                <c16:uniqueId val="{00000001-6745-4B0C-A71C-BF5D576B60DE}"/>
+              </c:ext>
+            </c:extLst>
           </c:dPt>
           <c:dPt>
             <c:idx val="1"/>
@@ -191,22 +173,62 @@
               </a:solidFill>
               <a:effectLst/>
             </c:spPr>
+            <c:extLst>
+              <c:ext xmlns:c16="http://schemas.microsoft.com/office/drawing/2014/chart" uri="{C3380CC4-5D6E-409C-BE32-E72D297353CC}">
+                <c16:uniqueId val="{00000003-6745-4B0C-A71C-BF5D576B60DE}"/>
+              </c:ext>
+            </c:extLst>
           </c:dPt>
+          <c:dLbls>
+            <c:numFmt formatCode="0.00&quot;M&quot;" sourceLinked="0"/>
+            <c:spPr>
+              <a:noFill/>
+              <a:ln>
+                <a:noFill/>
+              </a:ln>
+              <a:effectLst/>
+            </c:spPr>
+            <c:txPr>
+              <a:bodyPr/>
+              <a:lstStyle/>
+              <a:p>
+                <a:pPr>
+                  <a:defRPr sz="1200" b="0" i="0" u="none" strike="noStrike">
+                    <a:solidFill>
+                      <a:srgbClr val="102C36"/>
+                    </a:solidFill>
+                    <a:latin typeface="Aptos"/>
+                  </a:defRPr>
+                </a:pPr>
+                <a:endParaRPr lang="en-US"/>
+              </a:p>
+            </c:txPr>
+            <c:showLegendKey val="0"/>
+            <c:showVal val="1"/>
+            <c:showCatName val="0"/>
+            <c:showSerName val="0"/>
+            <c:showPercent val="0"/>
+            <c:showBubbleSize val="0"/>
+            <c:showLeaderLines val="0"/>
+            <c:extLst>
+              <c:ext xmlns:c15="http://schemas.microsoft.com/office/drawing/2012/chart" uri="{CE6537A1-D6FC-4f65-9D91-7224C49458BB}">
+                <c15:showLeaderLines val="0"/>
+              </c:ext>
+            </c:extLst>
+          </c:dLbls>
           <c:cat>
-            <c:multiLvlStrRef>
+            <c:strRef>
               <c:f>Sheet1!$A$2:$A$3</c:f>
-              <c:multiLvlStrCache>
+              <c:strCache>
                 <c:ptCount val="2"/>
-                <c:lvl>
-                  <c:pt idx="0">
-                    <c:v>Before</c:v>
-                  </c:pt>
-                  <c:pt idx="1">
-                    <c:v>After</c:v>
-                  </c:pt>
-                </c:lvl>
-              </c:multiLvlStrCache>
-            </c:multiLvlStrRef>
+                <c:pt idx="0">
+                  <c:v>Before</c:v>
+                </c:pt>
+                <c:pt idx="1">
+                  <c:v>After</c:v>
+                </c:pt>
+              </c:strCache>
+            </c:strRef>
           </c:cat>
           <c:val>
             <c:numRef>
@@ -218,41 +240,28 @@
                   <c:v>100</c:v>
                 </c:pt>
                 <c:pt idx="1">
-                  <c:v>93.91860386</c:v>
+                  <c:v>93.918603860000005</c:v>
                 </c:pt>
               </c:numCache>
             </c:numRef>
           </c:val>
+          <c:extLst>
+            <c:ext xmlns:c16="http://schemas.microsoft.com/office/drawing/2014/chart" uri="{C3380CC4-5D6E-409C-BE32-E72D297353CC}">
+              <c16:uniqueId val="{00000004-6745-4B0C-A71C-BF5D576B60DE}"/>
+            </c:ext>
+          </c:extLst>
         </c:ser>
         <c:dLbls>
-          <c:numFmt formatCode="0.00&quot;M&quot;" sourceLinked="0"/>
-          <c:txPr>
-            <a:bodyPr/>
-            <a:lstStyle/>
-            <a:p>
-              <a:pPr>
-                <a:defRPr b="0" i="0" strike="noStrike" sz="1200" u="none">
-                  <a:solidFill>
-                    <a:srgbClr val="102C36"/>
-                  </a:solidFill>
-                  <a:latin typeface="Aptos"/>
-                </a:defRPr>
-              </a:pPr>
-            </a:p>
-          </c:txPr>
           <c:showLegendKey val="0"/>
           <c:showVal val="1"/>
           <c:showCatName val="0"/>
           <c:showSerName val="0"/>
           <c:showPercent val="0"/>
           <c:showBubbleSize val="0"/>
-          <c:showLeaderLines val="0"/>
         </c:dLbls>
         <c:gapWidth val="150"/>
-        <c:overlap val="0"/>
         <c:axId val="2094734554"/>
         <c:axId val="2094734552"/>
-        <c:axId val="2094734556"/>
       </c:barChart>
       <c:catAx>
         <c:axId val="2094734554"/>
@@ -291,6 +300,7 @@
         <c:crosses val="autoZero"/>
         <c:auto val="1"/>
         <c:lblAlgn val="ctr"/>
+        <c:lblOffset val="100"/>
         <c:noMultiLvlLbl val="1"/>
       </c:catAx>
       <c:valAx>
@@ -354,6 +364,7 @@
     </c:plotArea>
     <c:plotVisOnly val="1"/>
     <c:dispBlanksAs val="span"/>
+    <c:showDLblsOverMax val="1"/>
   </c:chart>
   <c:spPr>
     <a:noFill/>
@@ -390,234 +401,10 @@
           <a:chExt cx="0" cy="0"/>
         </a:xfrm>
       </p:grpSpPr>
-      <p:sp>
-        <p:nvSpPr>
-          <p:cNvPr id="2" name="Header Placeholder 1"/>
-          <p:cNvSpPr>
-            <a:spLocks noGrp="1"/>
-          </p:cNvSpPr>
-          <p:nvPr>
-            <p:ph type="hdr" sz="quarter"/>
-          </p:nvPr>
-        </p:nvSpPr>
-        <p:spPr>
-          <a:xfrm>
-            <a:off x="0" y="0"/>
-            <a:ext cx="2971800" cy="458788"/>
-          </a:xfrm>
-          <a:prstGeom prst="rect">
-            <a:avLst/>
-          </a:prstGeom>
-        </p:spPr>
-        <p:txBody>
-          <a:bodyPr vert="horz" lIns="91440" tIns="45720" rIns="91440" bIns="45720" rtlCol="0"/>
-          <a:lstStyle>
-            <a:lvl1pPr algn="l">
-              <a:defRPr sz="1200"/>
-            </a:lvl1pPr>
-          </a:lstStyle>
-          <a:p>
-            <a:endParaRPr lang="en-US"/>
-          </a:p>
-        </p:txBody>
-      </p:sp>
-      <p:sp>
-        <p:nvSpPr>
-          <p:cNvPr id="3" name="Date Placeholder 2"/>
-          <p:cNvSpPr>
-            <a:spLocks noGrp="1"/>
-          </p:cNvSpPr>
-          <p:nvPr>
-            <p:ph type="dt" idx="1"/>
-          </p:nvPr>
-        </p:nvSpPr>
-        <p:spPr>
-          <a:xfrm>
-            <a:off x="3884613" y="0"/>
-            <a:ext cx="2971800" cy="458788"/>
-          </a:xfrm>
-          <a:prstGeom prst="rect">
-            <a:avLst/>
-          </a:prstGeom>
-        </p:spPr>
-        <p:txBody>
-          <a:bodyPr vert="horz" lIns="91440" tIns="45720" rIns="91440" bIns="45720" rtlCol="0"/>
-          <a:lstStyle>
-            <a:lvl1pPr algn="r">
-              <a:defRPr sz="1200"/>
-            </a:lvl1pPr>
-          </a:lstStyle>
-          <a:p>
-            <a:fld id="{5282F153-3F37-0F45-9E97-73ACFA13230C}" type="datetimeFigureOut">
-              <a:rPr lang="en-US"/>
-              <a:t>7/23/19</a:t>
-            </a:fld>
-            <a:endParaRPr lang="en-US"/>
-          </a:p>
-        </p:txBody>
-      </p:sp>
-      <p:sp>
-        <p:nvSpPr>
-          <p:cNvPr id="4" name="Slide Image Placeholder 3"/>
-          <p:cNvSpPr>
-            <a:spLocks noGrp="1" noRot="1" noChangeAspect="1"/>
-          </p:cNvSpPr>
-          <p:nvPr>
-            <p:ph type="sldImg" idx="2"/>
-          </p:nvPr>
-        </p:nvSpPr>
-        <p:spPr>
-          <a:xfrm>
-            <a:off x="685800" y="1143000"/>
-            <a:ext cx="5486400" cy="3086100"/>
-          </a:xfrm>
-          <a:prstGeom prst="rect">
-            <a:avLst/>
-          </a:prstGeom>
-          <a:noFill/>
-          <a:ln w="12700">
-            <a:solidFill>
-              <a:prstClr val="black"/>
-            </a:solidFill>
-          </a:ln>
-        </p:spPr>
-        <p:txBody>
-          <a:bodyPr vert="horz" lIns="91440" tIns="45720" rIns="91440" bIns="45720" rtlCol="0" anchor="ctr"/>
-          <a:lstStyle/>
-          <a:p>
-            <a:endParaRPr lang="en-US"/>
-          </a:p>
-        </p:txBody>
-      </p:sp>
-      <p:sp>
-        <p:nvSpPr>
-          <p:cNvPr id="5" name="Notes Placeholder 4"/>
-          <p:cNvSpPr>
-            <a:spLocks noGrp="1"/>
-          </p:cNvSpPr>
-          <p:nvPr>
-            <p:ph type="body" sz="quarter" idx="3"/>
-          </p:nvPr>
-        </p:nvSpPr>
-        <p:spPr>
-          <a:xfrm>
-            <a:off x="685800" y="4400550"/>
-            <a:ext cx="5486400" cy="3600450"/>
-          </a:xfrm>
-          <a:prstGeom prst="rect">
-            <a:avLst/>
-          </a:prstGeom>
-        </p:spPr>
-        <p:txBody>
-          <a:bodyPr vert="horz" lIns="91440" tIns="45720" rIns="91440" bIns="45720" rtlCol="0"/>
-          <a:lstStyle/>
-          <a:p>
-            <a:pPr lvl="0"/>
-            <a:r>
-              <a:rPr lang="en-US"/>
-              <a:t>Click to edit Master text styles</a:t>
-            </a:r>
-          </a:p>
-          <a:p>
-            <a:pPr lvl="1"/>
-            <a:r>
-              <a:rPr lang="en-US"/>
-              <a:t>Second level</a:t>
-            </a:r>
-          </a:p>
-          <a:p>
-            <a:pPr lvl="2"/>
-            <a:r>
-              <a:rPr lang="en-US"/>
-              <a:t>Third level</a:t>
-            </a:r>
-          </a:p>
-          <a:p>
-            <a:pPr lvl="3"/>
-            <a:r>
-              <a:rPr lang="en-US"/>
-              <a:t>Fourth level</a:t>
-            </a:r>
-          </a:p>
-          <a:p>
-            <a:pPr lvl="4"/>
-            <a:r>
-              <a:rPr lang="en-US"/>
-              <a:t>Fifth level</a:t>
-            </a:r>
-          </a:p>
-        </p:txBody>
-      </p:sp>
-      <p:sp>
-        <p:nvSpPr>
-          <p:cNvPr id="6" name="Footer Placeholder 5"/>
-          <p:cNvSpPr>
-            <a:spLocks noGrp="1"/>
-          </p:cNvSpPr>
-          <p:nvPr>
-            <p:ph type="ftr" sz="quarter" idx="4"/>
-          </p:nvPr>
-        </p:nvSpPr>
-        <p:spPr>
-          <a:xfrm>
-            <a:off x="0" y="8685213"/>
-            <a:ext cx="2971800" cy="458787"/>
-          </a:xfrm>
-          <a:prstGeom prst="rect">
-            <a:avLst/>
-          </a:prstGeom>
-        </p:spPr>
-        <p:txBody>
-          <a:bodyPr vert="horz" lIns="91440" tIns="45720" rIns="91440" bIns="45720" rtlCol="0" anchor="b"/>
-          <a:lstStyle>
-            <a:lvl1pPr algn="l">
-              <a:defRPr sz="1200"/>
-            </a:lvl1pPr>
-          </a:lstStyle>
-          <a:p>
-            <a:endParaRPr lang="en-US"/>
-          </a:p>
-        </p:txBody>
-      </p:sp>
-      <p:sp>
-        <p:nvSpPr>
-          <p:cNvPr id="7" name="Slide Number Placeholder 6"/>
-          <p:cNvSpPr>
-            <a:spLocks noGrp="1"/>
-          </p:cNvSpPr>
-          <p:nvPr>
-            <p:ph type="sldNum" sz="quarter" idx="5"/>
-          </p:nvPr>
-        </p:nvSpPr>
-        <p:spPr>
-          <a:xfrm>
-            <a:off x="3884613" y="8685213"/>
-            <a:ext cx="2971800" cy="458787"/>
-          </a:xfrm>
-          <a:prstGeom prst="rect">
-            <a:avLst/>
-          </a:prstGeom>
-        </p:spPr>
-        <p:txBody>
-          <a:bodyPr vert="horz" lIns="91440" tIns="45720" rIns="91440" bIns="45720" rtlCol="0" anchor="b"/>
-          <a:lstStyle>
-            <a:lvl1pPr algn="r">
-              <a:defRPr sz="1200"/>
-            </a:lvl1pPr>
-          </a:lstStyle>
-          <a:p>
-            <a:fld id="{CE5E9CC1-C706-0F49-92D6-E571CC5EEA8F}" type="slidenum">
-              <a:rPr lang="en-US"/>
-              <a:t>‹#›</a:t>
-            </a:fld>
-            <a:endParaRPr lang="en-US"/>
-          </a:p>
-        </p:txBody>
-      </p:sp>
     </p:spTree>
     <p:extLst>
       <p:ext uri="{BB962C8B-B14F-4D97-AF65-F5344CB8AC3E}">
-        <p14:creationId xmlns:p14="http://schemas.microsoft.com/office/powerpoint/2010/main" val="1024086991"/>
+        <p14:creationId xmlns:p14="http://schemas.microsoft.com/office/powerpoint/2010/main" val="3054272465"/>
       </p:ext>
     </p:extLst>
   </p:cSld>
@@ -765,7 +552,6 @@
               <a:rPr lang="en-US" dirty="0"/>
               <a:t>Educational hackathon prototype. All demo reports and portfolio positions are synthetic. Fill candidate details before submission. Branding does not imply sponsor endorsement.</a:t>
             </a:r>
-            <a:endParaRPr lang="en-US" dirty="0"/>
           </a:p>
         </p:txBody>
       </p:sp>
@@ -853,7 +639,6 @@
               <a:rPr lang="en-US" dirty="0"/>
               <a:t>The value chain is information, intelligence, risk signal, scenario, portfolio impact and decision support. The application implements Module B strategic portfolio stress testing.</a:t>
             </a:r>
-            <a:endParaRPr lang="en-US" dirty="0"/>
           </a:p>
         </p:txBody>
       </p:sp>
@@ -941,7 +726,6 @@
               <a:rPr lang="en-US" dirty="0"/>
               <a:t>Sources are BBC business RSS and Reddit finance Atom in live mode, plus independent local fallbacks. Source adapters normalize content. Cleaning, deduplication and dictionary entities feed a deterministic provider. Local JSON persists normalized inputs, signals and scenario results. The browser polls state every 30 seconds; live feeds refresh at most once per five minutes while requested. See docs/METHODOLOGY.md and source code.</a:t>
             </a:r>
-            <a:endParaRPr lang="en-US" dirty="0"/>
           </a:p>
         </p:txBody>
       </p:sp>
@@ -1029,7 +813,6 @@
               <a:rPr lang="en-US" dirty="0"/>
               <a:t>Values come from the actual TypeScript risk engine at a fixed demonstration clock. No random scores, pretrained model or paid API is required. Confidence is rule evidence, not measured accuracy. Transformers.js was investigated but model downloads and finance-specific validation were avoided for reliable offline judging. https://huggingface.co/docs/transformers.js/en/pipelines</a:t>
             </a:r>
-            <a:endParaRPr lang="en-US" dirty="0"/>
           </a:p>
         </p:txBody>
       </p:sp>
@@ -1117,7 +900,6 @@
               <a:rPr lang="en-US" dirty="0"/>
               <a:t>The generator computes these outputs by calling the same services as the API. Rates and spreads are decimals internally; 0.01 equals 100 basis points. Duration values bonds, incremental EAD × PD × LGD values loans, signed DV01 values swaps, and signed exposure values FX. Derivative hedges can gain. This scenario is not a forecast.</a:t>
             </a:r>
-            <a:endParaRPr lang="en-US" dirty="0"/>
           </a:p>
         </p:txBody>
       </p:sp>
@@ -1205,7 +987,6 @@
               <a:rPr lang="en-US" dirty="0"/>
               <a:t>The screenshot is a locally rendered application view, when available. Key outputs include machine-readable signals, factors explaining impact, automatic threshold triggers, individual scenario exports and position-level loss attribution. These are prototype capabilities, not evidence of predictive accuracy.</a:t>
             </a:r>
-            <a:endParaRPr lang="en-US" dirty="0"/>
           </a:p>
         </p:txBody>
       </p:sp>
@@ -1293,7 +1074,6 @@
               <a:rPr lang="en-US" dirty="0"/>
               <a:t>Limitations include fixed parallel shocks, no convexity, no yield-curve modeling, no stressed liquidity, no calibrated dependence or production authentication. Real company dictionary entries are lookup examples only. All sample events are fictional.</a:t>
             </a:r>
-            <a:endParaRPr lang="en-US" dirty="0"/>
           </a:p>
         </p:txBody>
       </p:sp>
@@ -1366,6 +1146,11 @@
 <file path=ppt/slideMasters/slideMaster1.xml><?xml version="1.0" encoding="utf-8"?>
 <p:sldMaster xmlns:a="http://schemas.openxmlformats.org/drawingml/2006/main" xmlns:r="http://schemas.openxmlformats.org/officeDocument/2006/relationships" xmlns:p="http://schemas.openxmlformats.org/presentationml/2006/main">
   <p:cSld>
+    <p:bg>
+      <p:bgRef idx="1001">
+        <a:schemeClr val="bg1"/>
+      </p:bgRef>
+    </p:bg>
     <p:spTree>
       <p:nvGrpSpPr>
         <p:cNvPr id="1" name=""/>
@@ -1648,6 +1433,7 @@
         <a:solidFill>
           <a:srgbClr val="102C36"/>
         </a:solidFill>
+        <a:effectLst/>
       </p:bgPr>
     </p:bg>
     <p:spTree>
@@ -1685,7 +1471,7 @@
           <a:bodyPr wrap="square" lIns="0" tIns="0" rIns="0" bIns="0" rtlCol="0" anchor="ctr"/>
           <a:lstStyle/>
           <a:p>
-            <a:pPr indent="0" marL="0">
+            <a:pPr marL="0" indent="0">
               <a:spcAft>
                 <a:spcPts val="800"/>
               </a:spcAft>
@@ -1727,7 +1513,7 @@
           <a:bodyPr wrap="square" lIns="0" tIns="0" rIns="0" bIns="0" rtlCol="0" anchor="ctr"/>
           <a:lstStyle/>
           <a:p>
-            <a:pPr indent="0" marL="0">
+            <a:pPr marL="0" indent="0">
               <a:spcAft>
                 <a:spcPts val="800"/>
               </a:spcAft>
@@ -1747,7 +1533,7 @@
             <a:endParaRPr lang="en-US" sz="2600" dirty="0"/>
           </a:p>
           <a:p>
-            <a:pPr indent="0" marL="0">
+            <a:pPr marL="0" indent="0">
               <a:spcAft>
                 <a:spcPts val="800"/>
               </a:spcAft>
@@ -1789,7 +1575,7 @@
           <a:bodyPr wrap="square" lIns="0" tIns="0" rIns="0" bIns="0" rtlCol="0" anchor="ctr"/>
           <a:lstStyle/>
           <a:p>
-            <a:pPr indent="0" marL="0">
+            <a:pPr marL="0" indent="0">
               <a:spcAft>
                 <a:spcPts val="800"/>
               </a:spcAft>
@@ -1831,7 +1617,7 @@
           <a:bodyPr wrap="square" lIns="0" tIns="0" rIns="0" bIns="0" rtlCol="0" anchor="ctr"/>
           <a:lstStyle/>
           <a:p>
-            <a:pPr indent="0" marL="0">
+            <a:pPr marL="0" indent="0">
               <a:spcAft>
                 <a:spcPts val="800"/>
               </a:spcAft>
@@ -1846,12 +1632,45 @@
                 <a:ea typeface="Aptos" pitchFamily="34" charset="-122"/>
                 <a:cs typeface="Aptos" pitchFamily="34" charset="-120"/>
               </a:rPr>
-              <a:t>Candidate: [FILL HERE]</a:t>
+              <a:t>Candidate: </a:t>
+            </a:r>
+            <a:r>
+              <a:rPr lang="en-US" sz="1700" dirty="0" err="1">
+                <a:solidFill>
+                  <a:srgbClr val="A1B9BB"/>
+                </a:solidFill>
+                <a:latin typeface="Aptos" pitchFamily="34" charset="0"/>
+                <a:ea typeface="Aptos" pitchFamily="34" charset="-122"/>
+                <a:cs typeface="Aptos" pitchFamily="34" charset="-120"/>
+              </a:rPr>
+              <a:t>Shatadru</a:t>
+            </a:r>
+            <a:r>
+              <a:rPr lang="en-US" sz="1700" dirty="0">
+                <a:solidFill>
+                  <a:srgbClr val="A1B9BB"/>
+                </a:solidFill>
+                <a:latin typeface="Aptos" pitchFamily="34" charset="0"/>
+                <a:ea typeface="Aptos" pitchFamily="34" charset="-122"/>
+                <a:cs typeface="Aptos" pitchFamily="34" charset="-120"/>
+              </a:rPr>
+              <a:t> </a:t>
+            </a:r>
+            <a:r>
+              <a:rPr lang="en-US" sz="1700" dirty="0" err="1">
+                <a:solidFill>
+                  <a:srgbClr val="A1B9BB"/>
+                </a:solidFill>
+                <a:latin typeface="Aptos" pitchFamily="34" charset="0"/>
+                <a:ea typeface="Aptos" pitchFamily="34" charset="-122"/>
+                <a:cs typeface="Aptos" pitchFamily="34" charset="-120"/>
+              </a:rPr>
+              <a:t>Adhikary</a:t>
             </a:r>
             <a:endParaRPr lang="en-US" sz="1700" dirty="0"/>
           </a:p>
           <a:p>
-            <a:pPr indent="0" marL="0">
+            <a:pPr marL="0" indent="0">
               <a:spcAft>
                 <a:spcPts val="800"/>
               </a:spcAft>
@@ -1866,12 +1685,12 @@
                 <a:ea typeface="Aptos" pitchFamily="34" charset="-122"/>
                 <a:cs typeface="Aptos" pitchFamily="34" charset="-120"/>
               </a:rPr>
-              <a:t>College / campus: [FILL HERE]</a:t>
+              <a:t>College / campus: Vellore Institute of Technology</a:t>
             </a:r>
             <a:endParaRPr lang="en-US" sz="1700" dirty="0"/>
           </a:p>
           <a:p>
-            <a:pPr indent="0" marL="0">
+            <a:pPr marL="0" indent="0">
               <a:spcAft>
                 <a:spcPts val="800"/>
               </a:spcAft>
@@ -1886,7 +1705,7 @@
                 <a:ea typeface="Aptos" pitchFamily="34" charset="-122"/>
                 <a:cs typeface="Aptos" pitchFamily="34" charset="-120"/>
               </a:rPr>
-              <a:t>College email: [FILL HERE]</a:t>
+              <a:t>College email: shatadru.23bce8160@vitapstudent.ac.in</a:t>
             </a:r>
             <a:endParaRPr lang="en-US" sz="1700" dirty="0"/>
           </a:p>
@@ -1908,6 +1727,7 @@
         <a:solidFill>
           <a:srgbClr val="F5F8F5"/>
         </a:solidFill>
+        <a:effectLst/>
       </p:bgPr>
     </p:bg>
     <p:spTree>
@@ -1945,7 +1765,7 @@
           <a:bodyPr wrap="square" lIns="0" tIns="0" rIns="0" bIns="0" rtlCol="0" anchor="ctr"/>
           <a:lstStyle/>
           <a:p>
-            <a:pPr indent="0" marL="0">
+            <a:pPr marL="0" indent="0">
               <a:buNone/>
             </a:pPr>
             <a:r>
@@ -1984,7 +1804,7 @@
           <a:bodyPr wrap="square" lIns="0" tIns="0" rIns="0" bIns="0" rtlCol="0" anchor="ctr"/>
           <a:lstStyle/>
           <a:p>
-            <a:pPr indent="0" marL="0">
+            <a:pPr marL="0" indent="0">
               <a:buNone/>
             </a:pPr>
             <a:r>
@@ -2020,7 +1840,7 @@
           <a:bodyPr wrap="square" lIns="0" tIns="0" rIns="0" bIns="0" rtlCol="0" anchor="ctr"/>
           <a:lstStyle/>
           <a:p>
-            <a:pPr algn="r" indent="0" marL="0">
+            <a:pPr marL="0" indent="0" algn="r">
               <a:buNone/>
             </a:pPr>
             <a:r>
@@ -2056,7 +1876,7 @@
           <a:bodyPr wrap="square" lIns="0" tIns="0" rIns="0" bIns="0" rtlCol="0" anchor="ctr"/>
           <a:lstStyle/>
           <a:p>
-            <a:pPr indent="0" marL="0">
+            <a:pPr marL="0" indent="0">
               <a:spcAft>
                 <a:spcPts val="800"/>
               </a:spcAft>
@@ -2098,7 +1918,7 @@
           <a:bodyPr wrap="square" lIns="0" tIns="0" rIns="0" bIns="0" rtlCol="0" anchor="ctr"/>
           <a:lstStyle/>
           <a:p>
-            <a:pPr indent="0" marL="0">
+            <a:pPr marL="0" indent="0">
               <a:spcAft>
                 <a:spcPts val="800"/>
               </a:spcAft>
@@ -2140,7 +1960,7 @@
           <a:bodyPr wrap="square" lIns="0" tIns="0" rIns="0" bIns="0" rtlCol="0" anchor="ctr"/>
           <a:lstStyle/>
           <a:p>
-            <a:pPr indent="0" marL="0">
+            <a:pPr marL="0" indent="0">
               <a:spcAft>
                 <a:spcPts val="800"/>
               </a:spcAft>
@@ -2182,7 +2002,7 @@
           <a:bodyPr wrap="square" lIns="0" tIns="0" rIns="0" bIns="0" rtlCol="0" anchor="ctr"/>
           <a:lstStyle/>
           <a:p>
-            <a:pPr indent="0" marL="0">
+            <a:pPr marL="0" indent="0">
               <a:spcAft>
                 <a:spcPts val="800"/>
               </a:spcAft>
@@ -2248,7 +2068,7 @@
           <a:bodyPr wrap="square" lIns="0" tIns="0" rIns="0" bIns="0" rtlCol="0" anchor="ctr"/>
           <a:lstStyle/>
           <a:p>
-            <a:pPr indent="0" marL="0">
+            <a:pPr marL="0" indent="0">
               <a:spcAft>
                 <a:spcPts val="800"/>
               </a:spcAft>
@@ -2290,7 +2110,7 @@
           <a:bodyPr wrap="square" lIns="0" tIns="0" rIns="0" bIns="0" rtlCol="0" anchor="ctr"/>
           <a:lstStyle/>
           <a:p>
-            <a:pPr indent="0" marL="0">
+            <a:pPr marL="0" indent="0">
               <a:spcAft>
                 <a:spcPts val="800"/>
               </a:spcAft>
@@ -2356,7 +2176,7 @@
           <a:bodyPr wrap="square" lIns="0" tIns="0" rIns="0" bIns="0" rtlCol="0" anchor="ctr"/>
           <a:lstStyle/>
           <a:p>
-            <a:pPr indent="0" marL="0">
+            <a:pPr marL="0" indent="0">
               <a:spcAft>
                 <a:spcPts val="800"/>
               </a:spcAft>
@@ -2398,7 +2218,7 @@
           <a:bodyPr wrap="square" lIns="0" tIns="0" rIns="0" bIns="0" rtlCol="0" anchor="ctr"/>
           <a:lstStyle/>
           <a:p>
-            <a:pPr indent="0" marL="0">
+            <a:pPr marL="0" indent="0">
               <a:spcAft>
                 <a:spcPts val="800"/>
               </a:spcAft>
@@ -2464,7 +2284,7 @@
           <a:bodyPr wrap="square" lIns="0" tIns="0" rIns="0" bIns="0" rtlCol="0" anchor="ctr"/>
           <a:lstStyle/>
           <a:p>
-            <a:pPr indent="0" marL="0">
+            <a:pPr marL="0" indent="0">
               <a:spcAft>
                 <a:spcPts val="800"/>
               </a:spcAft>
@@ -2506,7 +2326,7 @@
           <a:bodyPr wrap="square" lIns="0" tIns="0" rIns="0" bIns="0" rtlCol="0" anchor="ctr"/>
           <a:lstStyle/>
           <a:p>
-            <a:pPr indent="0" marL="0">
+            <a:pPr marL="0" indent="0">
               <a:spcAft>
                 <a:spcPts val="800"/>
               </a:spcAft>
@@ -2548,7 +2368,7 @@
           <a:bodyPr wrap="square" lIns="0" tIns="0" rIns="0" bIns="0" rtlCol="0" anchor="ctr"/>
           <a:lstStyle/>
           <a:p>
-            <a:pPr indent="0" marL="0">
+            <a:pPr marL="0" indent="0">
               <a:spcAft>
                 <a:spcPts val="800"/>
               </a:spcAft>
@@ -2585,6 +2405,7 @@
         <a:solidFill>
           <a:srgbClr val="F5F8F5"/>
         </a:solidFill>
+        <a:effectLst/>
       </p:bgPr>
     </p:bg>
     <p:spTree>
@@ -2622,7 +2443,7 @@
           <a:bodyPr wrap="square" lIns="0" tIns="0" rIns="0" bIns="0" rtlCol="0" anchor="ctr"/>
           <a:lstStyle/>
           <a:p>
-            <a:pPr indent="0" marL="0">
+            <a:pPr marL="0" indent="0">
               <a:buNone/>
             </a:pPr>
             <a:r>
@@ -2661,7 +2482,7 @@
           <a:bodyPr wrap="square" lIns="0" tIns="0" rIns="0" bIns="0" rtlCol="0" anchor="ctr"/>
           <a:lstStyle/>
           <a:p>
-            <a:pPr indent="0" marL="0">
+            <a:pPr marL="0" indent="0">
               <a:buNone/>
             </a:pPr>
             <a:r>
@@ -2697,7 +2518,7 @@
           <a:bodyPr wrap="square" lIns="0" tIns="0" rIns="0" bIns="0" rtlCol="0" anchor="ctr"/>
           <a:lstStyle/>
           <a:p>
-            <a:pPr algn="r" indent="0" marL="0">
+            <a:pPr marL="0" indent="0" algn="r">
               <a:buNone/>
             </a:pPr>
             <a:r>
@@ -2714,14 +2535,14 @@
       </p:sp>
       <p:pic>
         <p:nvPicPr>
-          <p:cNvPr id="5" name="Image 0" descr="docs/architecture.png">    </p:cNvPr>
+          <p:cNvPr id="5" name="Image 0" descr="docs/architecture.png"/>
           <p:cNvPicPr>
             <a:picLocks noChangeAspect="1"/>
           </p:cNvPicPr>
           <p:nvPr/>
         </p:nvPicPr>
         <p:blipFill>
-          <a:blip r:embed="rId1"/>
+          <a:blip r:embed="rId3"/>
           <a:stretch>
             <a:fillRect/>
           </a:stretch>
@@ -2752,6 +2573,7 @@
         <a:solidFill>
           <a:srgbClr val="F5F8F5"/>
         </a:solidFill>
+        <a:effectLst/>
       </p:bgPr>
     </p:bg>
     <p:spTree>
@@ -2789,7 +2611,7 @@
           <a:bodyPr wrap="square" lIns="0" tIns="0" rIns="0" bIns="0" rtlCol="0" anchor="ctr"/>
           <a:lstStyle/>
           <a:p>
-            <a:pPr indent="0" marL="0">
+            <a:pPr marL="0" indent="0">
               <a:buNone/>
             </a:pPr>
             <a:r>
@@ -2828,7 +2650,7 @@
           <a:bodyPr wrap="square" lIns="0" tIns="0" rIns="0" bIns="0" rtlCol="0" anchor="ctr"/>
           <a:lstStyle/>
           <a:p>
-            <a:pPr indent="0" marL="0">
+            <a:pPr marL="0" indent="0">
               <a:buNone/>
             </a:pPr>
             <a:r>
@@ -2864,7 +2686,7 @@
           <a:bodyPr wrap="square" lIns="0" tIns="0" rIns="0" bIns="0" rtlCol="0" anchor="ctr"/>
           <a:lstStyle/>
           <a:p>
-            <a:pPr algn="r" indent="0" marL="0">
+            <a:pPr marL="0" indent="0" algn="r">
               <a:buNone/>
             </a:pPr>
             <a:r>
@@ -2900,7 +2722,7 @@
           <a:bodyPr wrap="square" lIns="0" tIns="0" rIns="0" bIns="0" rtlCol="0" anchor="ctr"/>
           <a:lstStyle/>
           <a:p>
-            <a:pPr indent="0" marL="0">
+            <a:pPr marL="0" indent="0">
               <a:spcAft>
                 <a:spcPts val="800"/>
               </a:spcAft>
@@ -2942,7 +2764,7 @@
           <a:bodyPr wrap="square" lIns="0" tIns="0" rIns="0" bIns="0" rtlCol="0" anchor="ctr"/>
           <a:lstStyle/>
           <a:p>
-            <a:pPr indent="0" marL="0">
+            <a:pPr marL="0" indent="0">
               <a:spcAft>
                 <a:spcPts val="800"/>
               </a:spcAft>
@@ -2984,7 +2806,7 @@
           <a:bodyPr wrap="square" lIns="0" tIns="0" rIns="0" bIns="0" rtlCol="0" anchor="ctr"/>
           <a:lstStyle/>
           <a:p>
-            <a:pPr indent="0" marL="0">
+            <a:pPr marL="0" indent="0">
               <a:spcAft>
                 <a:spcPts val="800"/>
               </a:spcAft>
@@ -3026,7 +2848,7 @@
           <a:bodyPr wrap="square" lIns="0" tIns="0" rIns="0" bIns="0" rtlCol="0" anchor="ctr"/>
           <a:lstStyle/>
           <a:p>
-            <a:pPr indent="0" marL="0">
+            <a:pPr marL="0" indent="0">
               <a:spcAft>
                 <a:spcPts val="800"/>
               </a:spcAft>
@@ -3068,7 +2890,7 @@
           <a:bodyPr wrap="square" lIns="0" tIns="0" rIns="0" bIns="0" rtlCol="0" anchor="ctr"/>
           <a:lstStyle/>
           <a:p>
-            <a:pPr indent="0" marL="0">
+            <a:pPr marL="0" indent="0">
               <a:spcAft>
                 <a:spcPts val="800"/>
               </a:spcAft>
@@ -3110,7 +2932,7 @@
           <a:bodyPr wrap="square" lIns="0" tIns="0" rIns="0" bIns="0" rtlCol="0" anchor="ctr"/>
           <a:lstStyle/>
           <a:p>
-            <a:pPr indent="0" marL="0">
+            <a:pPr marL="0" indent="0">
               <a:spcAft>
                 <a:spcPts val="800"/>
               </a:spcAft>
@@ -3152,7 +2974,7 @@
           <a:bodyPr wrap="square" lIns="0" tIns="0" rIns="0" bIns="0" rtlCol="0" anchor="ctr"/>
           <a:lstStyle/>
           <a:p>
-            <a:pPr indent="0" marL="0">
+            <a:pPr marL="0" indent="0">
               <a:spcAft>
                 <a:spcPts val="800"/>
               </a:spcAft>
@@ -3194,7 +3016,7 @@
           <a:bodyPr wrap="square" lIns="0" tIns="0" rIns="0" bIns="0" rtlCol="0" anchor="ctr"/>
           <a:lstStyle/>
           <a:p>
-            <a:pPr indent="0" marL="0">
+            <a:pPr marL="0" indent="0">
               <a:spcAft>
                 <a:spcPts val="800"/>
               </a:spcAft>
@@ -3236,7 +3058,7 @@
           <a:bodyPr wrap="square" lIns="0" tIns="0" rIns="0" bIns="0" rtlCol="0" anchor="ctr"/>
           <a:lstStyle/>
           <a:p>
-            <a:pPr indent="0" marL="0">
+            <a:pPr marL="0" indent="0">
               <a:spcAft>
                 <a:spcPts val="800"/>
               </a:spcAft>
@@ -3273,6 +3095,7 @@
         <a:solidFill>
           <a:srgbClr val="F5F8F5"/>
         </a:solidFill>
+        <a:effectLst/>
       </p:bgPr>
     </p:bg>
     <p:spTree>
@@ -3310,7 +3133,7 @@
           <a:bodyPr wrap="square" lIns="0" tIns="0" rIns="0" bIns="0" rtlCol="0" anchor="ctr"/>
           <a:lstStyle/>
           <a:p>
-            <a:pPr indent="0" marL="0">
+            <a:pPr marL="0" indent="0">
               <a:buNone/>
             </a:pPr>
             <a:r>
@@ -3349,7 +3172,7 @@
           <a:bodyPr wrap="square" lIns="0" tIns="0" rIns="0" bIns="0" rtlCol="0" anchor="ctr"/>
           <a:lstStyle/>
           <a:p>
-            <a:pPr indent="0" marL="0">
+            <a:pPr marL="0" indent="0">
               <a:buNone/>
             </a:pPr>
             <a:r>
@@ -3385,7 +3208,7 @@
           <a:bodyPr wrap="square" lIns="0" tIns="0" rIns="0" bIns="0" rtlCol="0" anchor="ctr"/>
           <a:lstStyle/>
           <a:p>
-            <a:pPr algn="r" indent="0" marL="0">
+            <a:pPr marL="0" indent="0" algn="r">
               <a:buNone/>
             </a:pPr>
             <a:r>
@@ -3421,7 +3244,7 @@
           <a:bodyPr wrap="square" lIns="0" tIns="0" rIns="0" bIns="0" rtlCol="0" anchor="ctr"/>
           <a:lstStyle/>
           <a:p>
-            <a:pPr indent="0" marL="0">
+            <a:pPr marL="0" indent="0">
               <a:spcAft>
                 <a:spcPts val="800"/>
               </a:spcAft>
@@ -3463,7 +3286,7 @@
           <a:bodyPr wrap="square" lIns="0" tIns="0" rIns="0" bIns="0" rtlCol="0" anchor="ctr"/>
           <a:lstStyle/>
           <a:p>
-            <a:pPr indent="0" marL="0">
+            <a:pPr marL="0" indent="0">
               <a:spcAft>
                 <a:spcPts val="800"/>
               </a:spcAft>
@@ -3505,7 +3328,7 @@
           <a:bodyPr wrap="square" lIns="0" tIns="0" rIns="0" bIns="0" rtlCol="0" anchor="ctr"/>
           <a:lstStyle/>
           <a:p>
-            <a:pPr indent="0" marL="0">
+            <a:pPr marL="0" indent="0">
               <a:spcAft>
                 <a:spcPts val="800"/>
               </a:spcAft>
@@ -3525,7 +3348,7 @@
             <a:endParaRPr lang="en-US" sz="2200" dirty="0"/>
           </a:p>
           <a:p>
-            <a:pPr indent="0" marL="0">
+            <a:pPr marL="0" indent="0">
               <a:spcAft>
                 <a:spcPts val="800"/>
               </a:spcAft>
@@ -3545,7 +3368,7 @@
             <a:endParaRPr lang="en-US" sz="2200" dirty="0"/>
           </a:p>
           <a:p>
-            <a:pPr indent="0" marL="0">
+            <a:pPr marL="0" indent="0">
               <a:spcAft>
                 <a:spcPts val="800"/>
               </a:spcAft>
@@ -3565,7 +3388,7 @@
             <a:endParaRPr lang="en-US" sz="2200" dirty="0"/>
           </a:p>
           <a:p>
-            <a:pPr indent="0" marL="0">
+            <a:pPr marL="0" indent="0">
               <a:spcAft>
                 <a:spcPts val="800"/>
               </a:spcAft>
@@ -3588,7 +3411,7 @@
       </p:sp>
       <p:graphicFrame>
         <p:nvGraphicFramePr>
-          <p:cNvPr id="8" name="Chart 0" descr=""/>
+          <p:cNvPr id="8" name="Chart 0"/>
           <p:cNvGraphicFramePr/>
           <p:nvPr/>
         </p:nvGraphicFramePr>
@@ -3596,9 +3419,9 @@
           <a:off x="6217920" y="2011680"/>
           <a:ext cx="5120640" cy="3337560"/>
         </p:xfrm>
-        <a:graphic xmlns:a="http://schemas.openxmlformats.org/drawingml/2006/main">
+        <a:graphic>
           <a:graphicData uri="http://schemas.openxmlformats.org/drawingml/2006/chart">
-            <c:chart xmlns:c="http://schemas.openxmlformats.org/drawingml/2006/chart" r:id="rId1"/>
+            <c:chart xmlns:c="http://schemas.openxmlformats.org/drawingml/2006/chart" xmlns:r="http://schemas.openxmlformats.org/officeDocument/2006/relationships" r:id="rId3"/>
           </a:graphicData>
         </a:graphic>
       </p:graphicFrame>
@@ -3623,7 +3446,7 @@
           <a:bodyPr wrap="square" lIns="0" tIns="0" rIns="0" bIns="0" rtlCol="0" anchor="ctr"/>
           <a:lstStyle/>
           <a:p>
-            <a:pPr indent="0" marL="0">
+            <a:pPr marL="0" indent="0">
               <a:spcAft>
                 <a:spcPts val="800"/>
               </a:spcAft>
@@ -3665,7 +3488,7 @@
           <a:bodyPr wrap="square" lIns="0" tIns="0" rIns="0" bIns="0" rtlCol="0" anchor="ctr"/>
           <a:lstStyle/>
           <a:p>
-            <a:pPr indent="0" marL="0">
+            <a:pPr marL="0" indent="0">
               <a:spcAft>
                 <a:spcPts val="800"/>
               </a:spcAft>
@@ -3702,6 +3525,7 @@
         <a:solidFill>
           <a:srgbClr val="F5F8F5"/>
         </a:solidFill>
+        <a:effectLst/>
       </p:bgPr>
     </p:bg>
     <p:spTree>
@@ -3739,7 +3563,7 @@
           <a:bodyPr wrap="square" lIns="0" tIns="0" rIns="0" bIns="0" rtlCol="0" anchor="ctr"/>
           <a:lstStyle/>
           <a:p>
-            <a:pPr indent="0" marL="0">
+            <a:pPr marL="0" indent="0">
               <a:buNone/>
             </a:pPr>
             <a:r>
@@ -3778,7 +3602,7 @@
           <a:bodyPr wrap="square" lIns="0" tIns="0" rIns="0" bIns="0" rtlCol="0" anchor="ctr"/>
           <a:lstStyle/>
           <a:p>
-            <a:pPr indent="0" marL="0">
+            <a:pPr marL="0" indent="0">
               <a:buNone/>
             </a:pPr>
             <a:r>
@@ -3814,7 +3638,7 @@
           <a:bodyPr wrap="square" lIns="0" tIns="0" rIns="0" bIns="0" rtlCol="0" anchor="ctr"/>
           <a:lstStyle/>
           <a:p>
-            <a:pPr algn="r" indent="0" marL="0">
+            <a:pPr marL="0" indent="0" algn="r">
               <a:buNone/>
             </a:pPr>
             <a:r>
@@ -3831,14 +3655,14 @@
       </p:sp>
       <p:pic>
         <p:nvPicPr>
-          <p:cNvPr id="5" name="Image 0" descr="docs/dashboard.png">    </p:cNvPr>
+          <p:cNvPr id="5" name="Image 0" descr="docs/dashboard.png"/>
           <p:cNvPicPr>
             <a:picLocks noChangeAspect="1"/>
           </p:cNvPicPr>
           <p:nvPr/>
         </p:nvPicPr>
         <p:blipFill>
-          <a:blip r:embed="rId1"/>
+          <a:blip r:embed="rId3"/>
           <a:stretch>
             <a:fillRect/>
           </a:stretch>
@@ -3874,7 +3698,7 @@
           <a:bodyPr wrap="square" lIns="0" tIns="0" rIns="0" bIns="0" rtlCol="0" anchor="ctr"/>
           <a:lstStyle/>
           <a:p>
-            <a:pPr indent="0" marL="0">
+            <a:pPr marL="0" indent="0">
               <a:spcAft>
                 <a:spcPts val="800"/>
               </a:spcAft>
@@ -3916,7 +3740,7 @@
           <a:bodyPr wrap="square" lIns="0" tIns="0" rIns="0" bIns="0" rtlCol="0" anchor="ctr"/>
           <a:lstStyle/>
           <a:p>
-            <a:pPr indent="0" marL="0">
+            <a:pPr marL="0" indent="0">
               <a:spcAft>
                 <a:spcPts val="800"/>
               </a:spcAft>
@@ -3958,7 +3782,7 @@
           <a:bodyPr wrap="square" lIns="0" tIns="0" rIns="0" bIns="0" rtlCol="0" anchor="ctr"/>
           <a:lstStyle/>
           <a:p>
-            <a:pPr indent="0" marL="0">
+            <a:pPr marL="0" indent="0">
               <a:spcAft>
                 <a:spcPts val="800"/>
               </a:spcAft>
@@ -4000,7 +3824,7 @@
           <a:bodyPr wrap="square" lIns="0" tIns="0" rIns="0" bIns="0" rtlCol="0" anchor="ctr"/>
           <a:lstStyle/>
           <a:p>
-            <a:pPr indent="0" marL="0">
+            <a:pPr marL="0" indent="0">
               <a:spcAft>
                 <a:spcPts val="800"/>
               </a:spcAft>
@@ -4042,7 +3866,7 @@
           <a:bodyPr wrap="square" lIns="0" tIns="0" rIns="0" bIns="0" rtlCol="0" anchor="ctr"/>
           <a:lstStyle/>
           <a:p>
-            <a:pPr indent="0" marL="0">
+            <a:pPr marL="0" indent="0">
               <a:spcAft>
                 <a:spcPts val="800"/>
               </a:spcAft>
@@ -4079,6 +3903,7 @@
         <a:solidFill>
           <a:srgbClr val="F5F8F5"/>
         </a:solidFill>
+        <a:effectLst/>
       </p:bgPr>
     </p:bg>
     <p:spTree>
@@ -4116,7 +3941,7 @@
           <a:bodyPr wrap="square" lIns="0" tIns="0" rIns="0" bIns="0" rtlCol="0" anchor="ctr"/>
           <a:lstStyle/>
           <a:p>
-            <a:pPr indent="0" marL="0">
+            <a:pPr marL="0" indent="0">
               <a:buNone/>
             </a:pPr>
             <a:r>
@@ -4155,7 +3980,7 @@
           <a:bodyPr wrap="square" lIns="0" tIns="0" rIns="0" bIns="0" rtlCol="0" anchor="ctr"/>
           <a:lstStyle/>
           <a:p>
-            <a:pPr indent="0" marL="0">
+            <a:pPr marL="0" indent="0">
               <a:buNone/>
             </a:pPr>
             <a:r>
@@ -4191,7 +4016,7 @@
           <a:bodyPr wrap="square" lIns="0" tIns="0" rIns="0" bIns="0" rtlCol="0" anchor="ctr"/>
           <a:lstStyle/>
           <a:p>
-            <a:pPr algn="r" indent="0" marL="0">
+            <a:pPr marL="0" indent="0" algn="r">
               <a:buNone/>
             </a:pPr>
             <a:r>
@@ -4227,7 +4052,7 @@
           <a:bodyPr wrap="square" lIns="0" tIns="0" rIns="0" bIns="0" rtlCol="0" anchor="ctr"/>
           <a:lstStyle/>
           <a:p>
-            <a:pPr indent="0" marL="0">
+            <a:pPr marL="0" indent="0">
               <a:spcAft>
                 <a:spcPts val="800"/>
               </a:spcAft>
@@ -4269,7 +4094,7 @@
           <a:bodyPr wrap="square" lIns="0" tIns="0" rIns="0" bIns="0" rtlCol="0" anchor="ctr"/>
           <a:lstStyle/>
           <a:p>
-            <a:pPr indent="0" marL="0">
+            <a:pPr marL="0" indent="0">
               <a:spcAft>
                 <a:spcPts val="800"/>
               </a:spcAft>
@@ -4311,7 +4136,7 @@
           <a:bodyPr wrap="square" lIns="0" tIns="0" rIns="0" bIns="0" rtlCol="0" anchor="ctr"/>
           <a:lstStyle/>
           <a:p>
-            <a:pPr indent="0" marL="0">
+            <a:pPr marL="0" indent="0">
               <a:spcAft>
                 <a:spcPts val="800"/>
               </a:spcAft>
@@ -4353,7 +4178,7 @@
           <a:bodyPr wrap="square" lIns="0" tIns="0" rIns="0" bIns="0" rtlCol="0" anchor="ctr"/>
           <a:lstStyle/>
           <a:p>
-            <a:pPr indent="0" marL="0">
+            <a:pPr marL="0" indent="0">
               <a:spcAft>
                 <a:spcPts val="800"/>
               </a:spcAft>
@@ -4395,7 +4220,7 @@
           <a:bodyPr wrap="square" lIns="0" tIns="0" rIns="0" bIns="0" rtlCol="0" anchor="ctr"/>
           <a:lstStyle/>
           <a:p>
-            <a:pPr indent="0" marL="0">
+            <a:pPr marL="0" indent="0">
               <a:spcAft>
                 <a:spcPts val="800"/>
               </a:spcAft>
@@ -4437,7 +4262,7 @@
           <a:bodyPr wrap="square" lIns="0" tIns="0" rIns="0" bIns="0" rtlCol="0" anchor="ctr"/>
           <a:lstStyle/>
           <a:p>
-            <a:pPr indent="0" marL="0">
+            <a:pPr marL="0" indent="0">
               <a:spcAft>
                 <a:spcPts val="800"/>
               </a:spcAft>
@@ -4479,7 +4304,7 @@
           <a:bodyPr wrap="square" lIns="0" tIns="0" rIns="0" bIns="0" rtlCol="0" anchor="ctr"/>
           <a:lstStyle/>
           <a:p>
-            <a:pPr indent="0" marL="0">
+            <a:pPr marL="0" indent="0">
               <a:spcAft>
                 <a:spcPts val="800"/>
               </a:spcAft>
@@ -4521,7 +4346,7 @@
           <a:bodyPr wrap="square" lIns="0" tIns="0" rIns="0" bIns="0" rtlCol="0" anchor="ctr"/>
           <a:lstStyle/>
           <a:p>
-            <a:pPr indent="0" marL="0">
+            <a:pPr marL="0" indent="0">
               <a:spcAft>
                 <a:spcPts val="800"/>
               </a:spcAft>
@@ -4563,7 +4388,7 @@
           <a:bodyPr wrap="square" lIns="0" tIns="0" rIns="0" bIns="0" rtlCol="0" anchor="ctr"/>
           <a:lstStyle/>
           <a:p>
-            <a:pPr indent="0" marL="0">
+            <a:pPr marL="0" indent="0">
               <a:spcAft>
                 <a:spcPts val="800"/>
               </a:spcAft>
@@ -4605,7 +4430,7 @@
           <a:bodyPr wrap="square" lIns="0" tIns="0" rIns="0" bIns="0" rtlCol="0" anchor="ctr"/>
           <a:lstStyle/>
           <a:p>
-            <a:pPr indent="0" marL="0">
+            <a:pPr marL="0" indent="0">
               <a:spcAft>
                 <a:spcPts val="800"/>
               </a:spcAft>
@@ -4647,7 +4472,7 @@
           <a:bodyPr wrap="square" lIns="0" tIns="0" rIns="0" bIns="0" rtlCol="0" anchor="ctr"/>
           <a:lstStyle/>
           <a:p>
-            <a:pPr indent="0" marL="0">
+            <a:pPr marL="0" indent="0">
               <a:spcAft>
                 <a:spcPts val="800"/>
               </a:spcAft>
@@ -4969,4 +4794,299 @@
     </a:ext>
   </a:extLst>
 </a:theme>
+</file>
+
+<file path=ppt/theme/theme2.xml><?xml version="1.0" encoding="utf-8"?>
+<a:theme xmlns:a="http://schemas.openxmlformats.org/drawingml/2006/main" name="Office Theme">
+  <a:themeElements>
+    <a:clrScheme name="Office">
+      <a:dk1>
+        <a:sysClr val="windowText" lastClr="000000"/>
+      </a:dk1>
+      <a:lt1>
+        <a:sysClr val="window" lastClr="FFFFFF"/>
+      </a:lt1>
+      <a:dk2>
+        <a:srgbClr val="44546A"/>
+      </a:dk2>
+      <a:lt2>
+        <a:srgbClr val="E7E6E6"/>
+      </a:lt2>
+      <a:accent1>
+        <a:srgbClr val="4472C4"/>
+      </a:accent1>
+      <a:accent2>
+        <a:srgbClr val="ED7D31"/>
+      </a:accent2>
+      <a:accent3>
+        <a:srgbClr val="A5A5A5"/>
+      </a:accent3>
+      <a:accent4>
+        <a:srgbClr val="FFC000"/>
+      </a:accent4>
+      <a:accent5>
+        <a:srgbClr val="5B9BD5"/>
+      </a:accent5>
+      <a:accent6>
+        <a:srgbClr val="70AD47"/>
+      </a:accent6>
+      <a:hlink>
+        <a:srgbClr val="0563C1"/>
+      </a:hlink>
+      <a:folHlink>
+        <a:srgbClr val="954F72"/>
+      </a:folHlink>
+    </a:clrScheme>
+    <a:fontScheme name="Office">
+      <a:majorFont>
+        <a:latin typeface="Calibri Light" panose="020F0302020204030204"/>
+        <a:ea typeface=""/>
+        <a:cs typeface=""/>
+        <a:font script="Jpan" typeface="游ゴシック Light"/>
+        <a:font script="Hang" typeface="맑은 고딕"/>
+        <a:font script="Hans" typeface="等线 Light"/>
+        <a:font script="Hant" typeface="新細明體"/>
+        <a:font script="Arab" typeface="Times New Roman"/>
+        <a:font script="Hebr" typeface="Times New Roman"/>
+        <a:font script="Thai" typeface="Angsana New"/>
+        <a:font script="Ethi" typeface="Nyala"/>
+        <a:font script="Beng" typeface="Vrinda"/>
+        <a:font script="Gujr" typeface="Shruti"/>
+        <a:font script="Khmr" typeface="MoolBoran"/>
+        <a:font script="Knda" typeface="Tunga"/>
+        <a:font script="Guru" typeface="Raavi"/>
+        <a:font script="Cans" typeface="Euphemia"/>
+        <a:font script="Cher" typeface="Plantagenet Cherokee"/>
+        <a:font script="Yiii" typeface="Microsoft Yi Baiti"/>
+        <a:font script="Tibt" typeface="Microsoft Himalaya"/>
+        <a:font script="Thaa" typeface="MV Boli"/>
+        <a:font script="Deva" typeface="Mangal"/>
+        <a:font script="Telu" typeface="Gautami"/>
+        <a:font script="Taml" typeface="Latha"/>
+        <a:font script="Syrc" typeface="Estrangelo Edessa"/>
+        <a:font script="Orya" typeface="Kalinga"/>
+        <a:font script="Mlym" typeface="Kartika"/>
+        <a:font script="Laoo" typeface="DokChampa"/>
+        <a:font script="Sinh" typeface="Iskoola Pota"/>
+        <a:font script="Mong" typeface="Mongolian Baiti"/>
+        <a:font script="Viet" typeface="Times New Roman"/>
+        <a:font script="Uigh" typeface="Microsoft Uighur"/>
+        <a:font script="Geor" typeface="Sylfaen"/>
+        <a:font script="Armn" typeface="Arial"/>
+        <a:font script="Bugi" typeface="Leelawadee UI"/>
+        <a:font script="Bopo" typeface="Microsoft JhengHei"/>
+        <a:font script="Java" typeface="Javanese Text"/>
+        <a:font script="Lisu" typeface="Segoe UI"/>
+        <a:font script="Mymr" typeface="Myanmar Text"/>
+        <a:font script="Nkoo" typeface="Ebrima"/>
+        <a:font script="Olck" typeface="Nirmala UI"/>
+        <a:font script="Osma" typeface="Ebrima"/>
+        <a:font script="Phag" typeface="Phagspa"/>
+        <a:font script="Syrn" typeface="Estrangelo Edessa"/>
+        <a:font script="Syrj" typeface="Estrangelo Edessa"/>
+        <a:font script="Syre" typeface="Estrangelo Edessa"/>
+        <a:font script="Sora" typeface="Nirmala UI"/>
+        <a:font script="Tale" typeface="Microsoft Tai Le"/>
+        <a:font script="Talu" typeface="Microsoft New Tai Lue"/>
+        <a:font script="Tfng" typeface="Ebrima"/>
+      </a:majorFont>
+      <a:minorFont>
+        <a:latin typeface="Calibri" panose="020F0502020204030204"/>
+        <a:ea typeface=""/>
+        <a:cs typeface=""/>
+        <a:font script="Jpan" typeface="游ゴシック"/>
+        <a:font script="Hang" typeface="맑은 고딕"/>
+        <a:font script="Hans" typeface="等线"/>
+        <a:font script="Hant" typeface="新細明體"/>
+        <a:font script="Arab" typeface="Arial"/>
+        <a:font script="Hebr" typeface="Arial"/>
+        <a:font script="Thai" typeface="Cordia New"/>
+        <a:font script="Ethi" typeface="Nyala"/>
+        <a:font script="Beng" typeface="Vrinda"/>
+        <a:font script="Gujr" typeface="Shruti"/>
+        <a:font script="Khmr" typeface="DaunPenh"/>
+        <a:font script="Knda" typeface="Tunga"/>
+        <a:font script="Guru" typeface="Raavi"/>
+        <a:font script="Cans" typeface="Euphemia"/>
+        <a:font script="Cher" typeface="Plantagenet Cherokee"/>
+        <a:font script="Yiii" typeface="Microsoft Yi Baiti"/>
+        <a:font script="Tibt" typeface="Microsoft Himalaya"/>
+        <a:font script="Thaa" typeface="MV Boli"/>
+        <a:font script="Deva" typeface="Mangal"/>
+        <a:font script="Telu" typeface="Gautami"/>
+        <a:font script="Taml" typeface="Latha"/>
+        <a:font script="Syrc" typeface="Estrangelo Edessa"/>
+        <a:font script="Orya" typeface="Kalinga"/>
+        <a:font script="Mlym" typeface="Kartika"/>
+        <a:font script="Laoo" typeface="DokChampa"/>
+        <a:font script="Sinh" typeface="Iskoola Pota"/>
+        <a:font script="Mong" typeface="Mongolian Baiti"/>
+        <a:font script="Viet" typeface="Arial"/>
+        <a:font script="Uigh" typeface="Microsoft Uighur"/>
+        <a:font script="Geor" typeface="Sylfaen"/>
+        <a:font script="Armn" typeface="Arial"/>
+        <a:font script="Bugi" typeface="Leelawadee UI"/>
+        <a:font script="Bopo" typeface="Microsoft JhengHei"/>
+        <a:font script="Java" typeface="Javanese Text"/>
+        <a:font script="Lisu" typeface="Segoe UI"/>
+        <a:font script="Mymr" typeface="Myanmar Text"/>
+        <a:font script="Nkoo" typeface="Ebrima"/>
+        <a:font script="Olck" typeface="Nirmala UI"/>
+        <a:font script="Osma" typeface="Ebrima"/>
+        <a:font script="Phag" typeface="Phagspa"/>
+        <a:font script="Syrn" typeface="Estrangelo Edessa"/>
+        <a:font script="Syrj" typeface="Estrangelo Edessa"/>
+        <a:font script="Syre" typeface="Estrangelo Edessa"/>
+        <a:font script="Sora" typeface="Nirmala UI"/>
+        <a:font script="Tale" typeface="Microsoft Tai Le"/>
+        <a:font script="Talu" typeface="Microsoft New Tai Lue"/>
+        <a:font script="Tfng" typeface="Ebrima"/>
+      </a:minorFont>
+    </a:fontScheme>
+    <a:fmtScheme name="Office">
+      <a:fillStyleLst>
+        <a:solidFill>
+          <a:schemeClr val="phClr"/>
+        </a:solidFill>
+        <a:gradFill rotWithShape="1">
+          <a:gsLst>
+            <a:gs pos="0">
+              <a:schemeClr val="phClr">
+                <a:lumMod val="110000"/>
+                <a:satMod val="105000"/>
+                <a:tint val="67000"/>
+              </a:schemeClr>
+            </a:gs>
+            <a:gs pos="50000">
+              <a:schemeClr val="phClr">
+                <a:lumMod val="105000"/>
+                <a:satMod val="103000"/>
+                <a:tint val="73000"/>
+              </a:schemeClr>
+            </a:gs>
+            <a:gs pos="100000">
+              <a:schemeClr val="phClr">
+                <a:lumMod val="105000"/>
+                <a:satMod val="109000"/>
+                <a:tint val="81000"/>
+              </a:schemeClr>
+            </a:gs>
+          </a:gsLst>
+          <a:lin ang="5400000" scaled="0"/>
+        </a:gradFill>
+        <a:gradFill rotWithShape="1">
+          <a:gsLst>
+            <a:gs pos="0">
+              <a:schemeClr val="phClr">
+                <a:satMod val="103000"/>
+                <a:lumMod val="102000"/>
+                <a:tint val="94000"/>
+              </a:schemeClr>
+            </a:gs>
+            <a:gs pos="50000">
+              <a:schemeClr val="phClr">
+                <a:satMod val="110000"/>
+                <a:lumMod val="100000"/>
+                <a:shade val="100000"/>
+              </a:schemeClr>
+            </a:gs>
+            <a:gs pos="100000">
+              <a:schemeClr val="phClr">
+                <a:lumMod val="99000"/>
+                <a:satMod val="120000"/>
+                <a:shade val="78000"/>
+              </a:schemeClr>
+            </a:gs>
+          </a:gsLst>
+          <a:lin ang="5400000" scaled="0"/>
+        </a:gradFill>
+      </a:fillStyleLst>
+      <a:lnStyleLst>
+        <a:ln w="6350" cap="flat" cmpd="sng" algn="ctr">
+          <a:solidFill>
+            <a:schemeClr val="phClr"/>
+          </a:solidFill>
+          <a:prstDash val="solid"/>
+          <a:miter lim="800000"/>
+        </a:ln>
+        <a:ln w="12700" cap="flat" cmpd="sng" algn="ctr">
+          <a:solidFill>
+            <a:schemeClr val="phClr"/>
+          </a:solidFill>
+          <a:prstDash val="solid"/>
+          <a:miter lim="800000"/>
+        </a:ln>
+        <a:ln w="19050" cap="flat" cmpd="sng" algn="ctr">
+          <a:solidFill>
+            <a:schemeClr val="phClr"/>
+          </a:solidFill>
+          <a:prstDash val="solid"/>
+          <a:miter lim="800000"/>
+        </a:ln>
+      </a:lnStyleLst>
+      <a:effectStyleLst>
+        <a:effectStyle>
+          <a:effectLst/>
+        </a:effectStyle>
+        <a:effectStyle>
+          <a:effectLst/>
+        </a:effectStyle>
+        <a:effectStyle>
+          <a:effectLst>
+            <a:outerShdw blurRad="57150" dist="19050" dir="5400000" algn="ctr" rotWithShape="0">
+              <a:srgbClr val="000000">
+                <a:alpha val="63000"/>
+              </a:srgbClr>
+            </a:outerShdw>
+          </a:effectLst>
+        </a:effectStyle>
+      </a:effectStyleLst>
+      <a:bgFillStyleLst>
+        <a:solidFill>
+          <a:schemeClr val="phClr"/>
+        </a:solidFill>
+        <a:solidFill>
+          <a:schemeClr val="phClr">
+            <a:tint val="95000"/>
+            <a:satMod val="170000"/>
+          </a:schemeClr>
+        </a:solidFill>
+        <a:gradFill rotWithShape="1">
+          <a:gsLst>
+            <a:gs pos="0">
+              <a:schemeClr val="phClr">
+                <a:tint val="93000"/>
+                <a:satMod val="150000"/>
+                <a:shade val="98000"/>
+                <a:lumMod val="102000"/>
+              </a:schemeClr>
+            </a:gs>
+            <a:gs pos="50000">
+              <a:schemeClr val="phClr">
+                <a:tint val="98000"/>
+                <a:satMod val="130000"/>
+                <a:shade val="90000"/>
+                <a:lumMod val="103000"/>
+              </a:schemeClr>
+            </a:gs>
+            <a:gs pos="100000">
+              <a:schemeClr val="phClr">
+                <a:shade val="63000"/>
+                <a:satMod val="120000"/>
+              </a:schemeClr>
+            </a:gs>
+          </a:gsLst>
+          <a:lin ang="5400000" scaled="0"/>
+        </a:gradFill>
+      </a:bgFillStyleLst>
+    </a:fmtScheme>
+  </a:themeElements>
+  <a:objectDefaults/>
+  <a:extraClrSchemeLst/>
+  <a:extLst>
+    <a:ext uri="{05A4C25C-085E-4340-85A3-A5531E510DB2}">
+      <thm15:themeFamily xmlns:thm15="http://schemas.microsoft.com/office/thememl/2012/main" name="Office Theme" id="{62F939B6-93AF-4DB8-9C6B-D6C7DFDC589F}" vid="{4A3C46E8-61CC-4603-A589-7422A47A8E4A}"/>
+    </a:ext>
+  </a:extLst>
+</a:theme>
 </file>